--- a/thesis/presentations/chapter06_defence.pptx
+++ b/thesis/presentations/chapter06_defence.pptx
@@ -6872,7 +6872,7 @@
                 </a:solidFill>
                 <a:latin typeface="Calibri"/>
               </a:rPr>
-              <a:t>as published</a:t>
+              <a:t>before the fix</a:t>
             </a:r>
           </a:p>
         </p:txBody>
@@ -6911,7 +6911,7 @@
                 </a:solidFill>
                 <a:latin typeface="Calibri"/>
               </a:rPr>
-              <a:t>held out only</a:t>
+              <a:t>as published now</a:t>
             </a:r>
           </a:p>
         </p:txBody>
